--- a/03-population-health-powerbi/docs/Population_Health_Dashboard.pptx
+++ b/03-population-health-powerbi/docs/Population_Health_Dashboard.pptx
@@ -6054,7 +6054,7 @@
                 <a:ea typeface="Calibri" pitchFamily="34" charset="-122"/>
                 <a:cs typeface="Calibri" pitchFamily="34" charset="-120"/>
               </a:rPr>
-              <a:t>Build the .pbix: import the 11 CSVs, paste measures.dax, apply the theme</a:t>
+              <a:t>Open powerbi/pbip in Power BI Desktop and point DataFolder at the star schema</a:t>
             </a:r>
             <a:endParaRPr lang="en-US" sz="1050" dirty="0"/>
           </a:p>
@@ -6177,7 +6177,7 @@
                 <a:ea typeface="Calibri" pitchFamily="34" charset="-122"/>
                 <a:cs typeface="Calibri" pitchFamily="34" charset="-120"/>
               </a:rPr>
-              <a:t>Deliverables: src/generate_synthetic_data.py · notebooks/01_clean_and_build_star_schema.ipynb · data/star_schema/ · powerbi/measures.dax · powerbi/dashboard_spec.md · powerbi/theme_navy_teal.json · README.md</a:t>
+              <a:t>Deliverables: src/generate_synthetic_data.py · notebooks/01_clean_and_build_star_schema.ipynb · data/star_schema/ · powerbi/pbip (TMDL model + PBIR report) · powerbi/measures.dax · powerbi/dashboard_spec.md · README.md</a:t>
             </a:r>
             <a:endParaRPr lang="en-US" sz="1050" dirty="0"/>
           </a:p>
